--- a/Step 1 (Basics)/C++Basics/BasicsExtras.pptx
+++ b/Step 1 (Basics)/C++Basics/BasicsExtras.pptx
@@ -268,7 +268,7 @@
           <a:p>
             <a:fld id="{D051F719-D065-42D5-AEED-4C0FD72F571D}" type="datetimeFigureOut">
               <a:rPr lang="en-IN" smtClean="0"/>
-              <a:t>22-03-2025</a:t>
+              <a:t>19-07-2025</a:t>
             </a:fld>
             <a:endParaRPr lang="en-IN" dirty="0"/>
           </a:p>
@@ -468,7 +468,7 @@
           <a:p>
             <a:fld id="{D051F719-D065-42D5-AEED-4C0FD72F571D}" type="datetimeFigureOut">
               <a:rPr lang="en-IN" smtClean="0"/>
-              <a:t>22-03-2025</a:t>
+              <a:t>19-07-2025</a:t>
             </a:fld>
             <a:endParaRPr lang="en-IN" dirty="0"/>
           </a:p>
@@ -678,7 +678,7 @@
           <a:p>
             <a:fld id="{D051F719-D065-42D5-AEED-4C0FD72F571D}" type="datetimeFigureOut">
               <a:rPr lang="en-IN" smtClean="0"/>
-              <a:t>22-03-2025</a:t>
+              <a:t>19-07-2025</a:t>
             </a:fld>
             <a:endParaRPr lang="en-IN" dirty="0"/>
           </a:p>
@@ -878,7 +878,7 @@
           <a:p>
             <a:fld id="{D051F719-D065-42D5-AEED-4C0FD72F571D}" type="datetimeFigureOut">
               <a:rPr lang="en-IN" smtClean="0"/>
-              <a:t>22-03-2025</a:t>
+              <a:t>19-07-2025</a:t>
             </a:fld>
             <a:endParaRPr lang="en-IN" dirty="0"/>
           </a:p>
@@ -1154,7 +1154,7 @@
           <a:p>
             <a:fld id="{D051F719-D065-42D5-AEED-4C0FD72F571D}" type="datetimeFigureOut">
               <a:rPr lang="en-IN" smtClean="0"/>
-              <a:t>22-03-2025</a:t>
+              <a:t>19-07-2025</a:t>
             </a:fld>
             <a:endParaRPr lang="en-IN" dirty="0"/>
           </a:p>
@@ -1422,7 +1422,7 @@
           <a:p>
             <a:fld id="{D051F719-D065-42D5-AEED-4C0FD72F571D}" type="datetimeFigureOut">
               <a:rPr lang="en-IN" smtClean="0"/>
-              <a:t>22-03-2025</a:t>
+              <a:t>19-07-2025</a:t>
             </a:fld>
             <a:endParaRPr lang="en-IN" dirty="0"/>
           </a:p>
@@ -1837,7 +1837,7 @@
           <a:p>
             <a:fld id="{D051F719-D065-42D5-AEED-4C0FD72F571D}" type="datetimeFigureOut">
               <a:rPr lang="en-IN" smtClean="0"/>
-              <a:t>22-03-2025</a:t>
+              <a:t>19-07-2025</a:t>
             </a:fld>
             <a:endParaRPr lang="en-IN" dirty="0"/>
           </a:p>
@@ -1979,7 +1979,7 @@
           <a:p>
             <a:fld id="{D051F719-D065-42D5-AEED-4C0FD72F571D}" type="datetimeFigureOut">
               <a:rPr lang="en-IN" smtClean="0"/>
-              <a:t>22-03-2025</a:t>
+              <a:t>19-07-2025</a:t>
             </a:fld>
             <a:endParaRPr lang="en-IN" dirty="0"/>
           </a:p>
@@ -2092,7 +2092,7 @@
           <a:p>
             <a:fld id="{D051F719-D065-42D5-AEED-4C0FD72F571D}" type="datetimeFigureOut">
               <a:rPr lang="en-IN" smtClean="0"/>
-              <a:t>22-03-2025</a:t>
+              <a:t>19-07-2025</a:t>
             </a:fld>
             <a:endParaRPr lang="en-IN" dirty="0"/>
           </a:p>
@@ -2405,7 +2405,7 @@
           <a:p>
             <a:fld id="{D051F719-D065-42D5-AEED-4C0FD72F571D}" type="datetimeFigureOut">
               <a:rPr lang="en-IN" smtClean="0"/>
-              <a:t>22-03-2025</a:t>
+              <a:t>19-07-2025</a:t>
             </a:fld>
             <a:endParaRPr lang="en-IN" dirty="0"/>
           </a:p>
@@ -2694,7 +2694,7 @@
           <a:p>
             <a:fld id="{D051F719-D065-42D5-AEED-4C0FD72F571D}" type="datetimeFigureOut">
               <a:rPr lang="en-IN" smtClean="0"/>
-              <a:t>22-03-2025</a:t>
+              <a:t>19-07-2025</a:t>
             </a:fld>
             <a:endParaRPr lang="en-IN" dirty="0"/>
           </a:p>
@@ -2937,7 +2937,7 @@
           <a:p>
             <a:fld id="{D051F719-D065-42D5-AEED-4C0FD72F571D}" type="datetimeFigureOut">
               <a:rPr lang="en-IN" smtClean="0"/>
-              <a:t>22-03-2025</a:t>
+              <a:t>19-07-2025</a:t>
             </a:fld>
             <a:endParaRPr lang="en-IN" dirty="0"/>
           </a:p>
@@ -3435,7 +3435,7 @@
         </p:blipFill>
         <p:spPr>
           <a:xfrm>
-            <a:off x="74993" y="1821437"/>
+            <a:off x="8995" y="1821437"/>
             <a:ext cx="5834215" cy="4989338"/>
           </a:xfrm>
           <a:prstGeom prst="rect">
@@ -3533,7 +3533,7 @@
                 <a:ea typeface="Calibri" panose="020F0502020204030204" pitchFamily="34" charset="0"/>
                 <a:cs typeface="Times New Roman" panose="02020603050405020304" pitchFamily="18" charset="0"/>
               </a:rPr>
-              <a:t>Library that includes everything (time taken is negligible in comparison to the running of the code</a:t>
+              <a:t>Library that includes everything (time taken is negligible in comparison to the running of the code)</a:t>
             </a:r>
             <a:endParaRPr lang="en-IN" sz="1800" kern="100" dirty="0">
               <a:effectLst/>
@@ -3988,7 +3988,7 @@
             </a:pPr>
             <a:r>
               <a:rPr lang="en-US" dirty="0"/>
-              <a:t>the first element in an array can be stored anywhere in the CPU(so we can’t predict where it can be sure but we only the exact address after its stored) however for the subsequent elements we can be sure that they will be consecutive to each other.</a:t>
+              <a:t>the first element in an array can be stored anywhere in the CPU(so we can’t predict where it can be sure but we only know the exact address after its stored) however for the subsequent elements we can be sure that they will be consecutive to each other.</a:t>
             </a:r>
             <a:endParaRPr lang="en-IN" dirty="0"/>
           </a:p>
